--- a/inst/docs/Lecture2.pptx
+++ b/inst/docs/Lecture2.pptx
@@ -223,7 +223,7 @@
           <a:p>
             <a:fld id="{5BA85917-96BC-A94E-B108-436BB51A4016}" type="datetimeFigureOut">
               <a:rPr lang="en-US" smtClean="0"/>
-              <a:t>4/12/25</a:t>
+              <a:t>4/7/26</a:t>
             </a:fld>
             <a:endParaRPr lang="en-US"/>
           </a:p>
@@ -6918,13 +6918,14 @@
           </a:p>
           <a:p>
             <a:r>
-              <a:rPr lang="en-US" dirty="0" err="1"/>
+              <a:rPr lang="en-US" err="1"/>
               <a:t>Physalia</a:t>
             </a:r>
             <a:r>
-              <a:rPr lang="en-US" dirty="0"/>
-              <a:t> 2025</a:t>
-            </a:r>
+              <a:rPr lang="en-US"/>
+              <a:t> 2026</a:t>
+            </a:r>
+            <a:endParaRPr lang="en-US" dirty="0"/>
           </a:p>
         </p:txBody>
       </p:sp>

--- a/inst/docs/Lecture2.pptx
+++ b/inst/docs/Lecture2.pptx
@@ -223,7 +223,7 @@
           <a:p>
             <a:fld id="{5BA85917-96BC-A94E-B108-436BB51A4016}" type="datetimeFigureOut">
               <a:rPr lang="en-US" smtClean="0"/>
-              <a:t>4/7/26</a:t>
+              <a:t>4/13/26</a:t>
             </a:fld>
             <a:endParaRPr lang="en-US"/>
           </a:p>
@@ -10112,14 +10112,14 @@
           <p:nvPr>
             <p:extLst>
               <p:ext uri="{D42A27DB-BD31-4B8C-83A1-F6EECF244321}">
-                <p14:modId xmlns:p14="http://schemas.microsoft.com/office/powerpoint/2010/main" val="3396523281"/>
+                <p14:modId xmlns:p14="http://schemas.microsoft.com/office/powerpoint/2010/main" val="3359183634"/>
               </p:ext>
             </p:extLst>
           </p:nvPr>
         </p:nvGraphicFramePr>
         <p:xfrm>
-          <a:off x="870076" y="-685863"/>
-          <a:ext cx="8128000" cy="2595880"/>
+          <a:off x="5264456" y="2795211"/>
+          <a:ext cx="4227016" cy="2834640"/>
         </p:xfrm>
         <a:graphic>
           <a:graphicData uri="http://schemas.openxmlformats.org/drawingml/2006/table">
@@ -10128,43 +10128,36 @@
                 <a:tableStyleId>{5C22544A-7EE6-4342-B048-85BDC9FD1C3A}</a:tableStyleId>
               </a:tblPr>
               <a:tblGrid>
-                <a:gridCol w="1625600">
+                <a:gridCol w="1056754">
                   <a:extLst>
                     <a:ext uri="{9D8B030D-6E8A-4147-A177-3AD203B41FA5}">
                       <a16:colId xmlns:a16="http://schemas.microsoft.com/office/drawing/2014/main" val="122011324"/>
                     </a:ext>
                   </a:extLst>
                 </a:gridCol>
-                <a:gridCol w="1625600">
+                <a:gridCol w="1056754">
                   <a:extLst>
                     <a:ext uri="{9D8B030D-6E8A-4147-A177-3AD203B41FA5}">
                       <a16:colId xmlns:a16="http://schemas.microsoft.com/office/drawing/2014/main" val="1673105995"/>
                     </a:ext>
                   </a:extLst>
                 </a:gridCol>
-                <a:gridCol w="1625600">
+                <a:gridCol w="1056754">
                   <a:extLst>
                     <a:ext uri="{9D8B030D-6E8A-4147-A177-3AD203B41FA5}">
                       <a16:colId xmlns:a16="http://schemas.microsoft.com/office/drawing/2014/main" val="1082241236"/>
                     </a:ext>
                   </a:extLst>
                 </a:gridCol>
-                <a:gridCol w="1625600">
+                <a:gridCol w="1056754">
                   <a:extLst>
                     <a:ext uri="{9D8B030D-6E8A-4147-A177-3AD203B41FA5}">
                       <a16:colId xmlns:a16="http://schemas.microsoft.com/office/drawing/2014/main" val="2160108371"/>
                     </a:ext>
                   </a:extLst>
                 </a:gridCol>
-                <a:gridCol w="1625600">
-                  <a:extLst>
-                    <a:ext uri="{9D8B030D-6E8A-4147-A177-3AD203B41FA5}">
-                      <a16:colId xmlns:a16="http://schemas.microsoft.com/office/drawing/2014/main" val="3702323140"/>
-                    </a:ext>
-                  </a:extLst>
-                </a:gridCol>
               </a:tblGrid>
-              <a:tr h="370840">
+              <a:tr h="359003">
                 <a:tc>
                   <a:txBody>
                     <a:bodyPr/>
@@ -10214,23 +10207,13 @@
                   </a:txBody>
                   <a:tcPr/>
                 </a:tc>
-                <a:tc>
-                  <a:txBody>
-                    <a:bodyPr/>
-                    <a:lstStyle/>
-                    <a:p>
-                      <a:endParaRPr lang="en-US"/>
-                    </a:p>
-                  </a:txBody>
-                  <a:tcPr/>
-                </a:tc>
                 <a:extLst>
                   <a:ext uri="{0D108BD9-81ED-4DB2-BD59-A6C34878D82A}">
                     <a16:rowId xmlns:a16="http://schemas.microsoft.com/office/drawing/2014/main" val="3736554989"/>
                   </a:ext>
                 </a:extLst>
               </a:tr>
-              <a:tr h="370840">
+              <a:tr h="359003">
                 <a:tc>
                   <a:txBody>
                     <a:bodyPr/>
@@ -10283,23 +10266,13 @@
                   </a:txBody>
                   <a:tcPr/>
                 </a:tc>
-                <a:tc>
-                  <a:txBody>
-                    <a:bodyPr/>
-                    <a:lstStyle/>
-                    <a:p>
-                      <a:endParaRPr lang="en-US"/>
-                    </a:p>
-                  </a:txBody>
-                  <a:tcPr/>
-                </a:tc>
                 <a:extLst>
                   <a:ext uri="{0D108BD9-81ED-4DB2-BD59-A6C34878D82A}">
                     <a16:rowId xmlns:a16="http://schemas.microsoft.com/office/drawing/2014/main" val="2798565343"/>
                   </a:ext>
                 </a:extLst>
               </a:tr>
-              <a:tr h="370840">
+              <a:tr h="359003">
                 <a:tc>
                   <a:txBody>
                     <a:bodyPr/>
@@ -10352,23 +10325,13 @@
                   </a:txBody>
                   <a:tcPr/>
                 </a:tc>
-                <a:tc>
-                  <a:txBody>
-                    <a:bodyPr/>
-                    <a:lstStyle/>
-                    <a:p>
-                      <a:endParaRPr lang="en-US"/>
-                    </a:p>
-                  </a:txBody>
-                  <a:tcPr/>
-                </a:tc>
                 <a:extLst>
                   <a:ext uri="{0D108BD9-81ED-4DB2-BD59-A6C34878D82A}">
                     <a16:rowId xmlns:a16="http://schemas.microsoft.com/office/drawing/2014/main" val="3319644229"/>
                   </a:ext>
                 </a:extLst>
               </a:tr>
-              <a:tr h="370840">
+              <a:tr h="359003">
                 <a:tc>
                   <a:txBody>
                     <a:bodyPr/>
@@ -10421,23 +10384,13 @@
                   </a:txBody>
                   <a:tcPr/>
                 </a:tc>
-                <a:tc>
-                  <a:txBody>
-                    <a:bodyPr/>
-                    <a:lstStyle/>
-                    <a:p>
-                      <a:endParaRPr lang="en-US"/>
-                    </a:p>
-                  </a:txBody>
-                  <a:tcPr/>
-                </a:tc>
                 <a:extLst>
                   <a:ext uri="{0D108BD9-81ED-4DB2-BD59-A6C34878D82A}">
                     <a16:rowId xmlns:a16="http://schemas.microsoft.com/office/drawing/2014/main" val="148780830"/>
                   </a:ext>
                 </a:extLst>
               </a:tr>
-              <a:tr h="370840">
+              <a:tr h="359003">
                 <a:tc>
                   <a:txBody>
                     <a:bodyPr/>
@@ -10490,23 +10443,13 @@
                   </a:txBody>
                   <a:tcPr/>
                 </a:tc>
-                <a:tc>
-                  <a:txBody>
-                    <a:bodyPr/>
-                    <a:lstStyle/>
-                    <a:p>
-                      <a:endParaRPr lang="en-US" dirty="0"/>
-                    </a:p>
-                  </a:txBody>
-                  <a:tcPr/>
-                </a:tc>
                 <a:extLst>
                   <a:ext uri="{0D108BD9-81ED-4DB2-BD59-A6C34878D82A}">
                     <a16:rowId xmlns:a16="http://schemas.microsoft.com/office/drawing/2014/main" val="80618405"/>
                   </a:ext>
                 </a:extLst>
               </a:tr>
-              <a:tr h="370840">
+              <a:tr h="359003">
                 <a:tc>
                   <a:txBody>
                     <a:bodyPr/>
@@ -10559,23 +10502,13 @@
                   </a:txBody>
                   <a:tcPr/>
                 </a:tc>
-                <a:tc>
-                  <a:txBody>
-                    <a:bodyPr/>
-                    <a:lstStyle/>
-                    <a:p>
-                      <a:endParaRPr lang="en-US" dirty="0"/>
-                    </a:p>
-                  </a:txBody>
-                  <a:tcPr/>
-                </a:tc>
                 <a:extLst>
                   <a:ext uri="{0D108BD9-81ED-4DB2-BD59-A6C34878D82A}">
                     <a16:rowId xmlns:a16="http://schemas.microsoft.com/office/drawing/2014/main" val="1645340480"/>
                   </a:ext>
                 </a:extLst>
               </a:tr>
-              <a:tr h="370840">
+              <a:tr h="359003">
                 <a:tc>
                   <a:txBody>
                     <a:bodyPr/>
@@ -10624,16 +10557,6 @@
                         <a:rPr lang="en-US" dirty="0"/>
                         <a:t>drug</a:t>
                       </a:r>
-                    </a:p>
-                  </a:txBody>
-                  <a:tcPr/>
-                </a:tc>
-                <a:tc>
-                  <a:txBody>
-                    <a:bodyPr/>
-                    <a:lstStyle/>
-                    <a:p>
-                      <a:endParaRPr lang="en-US" dirty="0"/>
                     </a:p>
                   </a:txBody>
                   <a:tcPr/>
